--- a/Simple_Sense_Investor_Deck.pptx
+++ b/Simple_Sense_Investor_Deck.pptx
@@ -5343,7 +5343,7 @@
                 <a:ea typeface="Instrument Serif" pitchFamily="34" charset="-122"/>
                 <a:cs typeface="Instrument Serif" pitchFamily="34" charset="-120"/>
               </a:rPr>
-              <a:t>$2–7.7M</a:t>
+              <a:t>$3.5–9M</a:t>
             </a:r>
             <a:endParaRPr lang="en-US" sz="1600" dirty="0"/>
           </a:p>
@@ -5648,7 +5648,7 @@
                 <a:ea typeface="Instrument Serif" pitchFamily="34" charset="-122"/>
                 <a:cs typeface="Instrument Serif" pitchFamily="34" charset="-120"/>
               </a:rPr>
-              <a:t>~$0.25–0.4B / yr</a:t>
+              <a:t>~$0.5–0.8B / yr</a:t>
             </a:r>
             <a:endParaRPr lang="en-US" sz="1800" dirty="0"/>
           </a:p>
@@ -5690,7 +5690,7 @@
                 <a:ea typeface="Inter" pitchFamily="34" charset="-122"/>
                 <a:cs typeface="Inter" pitchFamily="34" charset="-120"/>
               </a:rPr>
-              <a:t>~250–400k merchants at $1–15M GMV on Shopify / Woo / BigCommerce × ~$1k blended ACV ($49–99/mo).</a:t>
+              <a:t>~250–400k merchants at $1–15M GMV on Shopify / Woo / BigCommerce × ~$2k blended ACV ($99–299/mo).</a:t>
             </a:r>
             <a:endParaRPr lang="en-US" sz="1080" dirty="0"/>
           </a:p>
@@ -5802,7 +5802,7 @@
                 <a:ea typeface="Instrument Serif" pitchFamily="34" charset="-122"/>
                 <a:cs typeface="Instrument Serif" pitchFamily="34" charset="-120"/>
               </a:rPr>
-              <a:t>~$2–7.7M ARR  (1–3% of SAM)</a:t>
+              <a:t>~$3.5–9M ARR  (~0.5–1.5% of SAM)</a:t>
             </a:r>
             <a:endParaRPr lang="en-US" sz="1800" dirty="0"/>
           </a:p>
@@ -5844,7 +5844,7 @@
                 <a:ea typeface="Inter" pitchFamily="34" charset="-122"/>
                 <a:cs typeface="Inter" pitchFamily="34" charset="-120"/>
               </a:rPr>
-              <a:t>~2,500–8,000 stores over 3–5 years — consistent with the Base/Best scenarios.</a:t>
+              <a:t>~1,600–4,000 stores over 3–5 years — consistent with the Base/Best scenarios.</a:t>
             </a:r>
             <a:endParaRPr lang="en-US" sz="1080" dirty="0"/>
           </a:p>
@@ -7214,7 +7214,7 @@
                 <a:ea typeface="Inter" pitchFamily="34" charset="-122"/>
                 <a:cs typeface="Inter" pitchFamily="34" charset="-120"/>
               </a:rPr>
-              <a:t>Two accessible tiers — deliberately under Triple Whale (~$99–219+) and Polar (~$300–750+). A free audit is the front door.</a:t>
+              <a:t>Two flat tiers — deliberately under Triple Whale (~$549–1,349+/mo at $1–2.5M GMV, and climbing) and Polar. A free audit is the front door.</a:t>
             </a:r>
             <a:endParaRPr lang="en-US" sz="1400" dirty="0"/>
           </a:p>
@@ -7574,7 +7574,7 @@
                 <a:ea typeface="Instrument Serif" pitchFamily="34" charset="-122"/>
                 <a:cs typeface="Instrument Serif" pitchFamily="34" charset="-120"/>
               </a:rPr>
-              <a:t>$49</a:t>
+              <a:t>$99</a:t>
             </a:r>
             <a:pPr indent="0" marL="0">
               <a:buNone/>
@@ -7627,7 +7627,7 @@
                 <a:ea typeface="Inter" pitchFamily="34" charset="-122"/>
                 <a:cs typeface="Inter" pitchFamily="34" charset="-120"/>
               </a:rPr>
-              <a:t>Solo &amp; growing operators</a:t>
+              <a:t>Single-store operators</a:t>
             </a:r>
             <a:endParaRPr lang="en-US" sz="1150" dirty="0"/>
           </a:p>
@@ -7673,7 +7673,7 @@
                 <a:ea typeface="Inter" pitchFamily="34" charset="-122"/>
                 <a:cs typeface="Inter" pitchFamily="34" charset="-120"/>
               </a:rPr>
-              <a:t>Geo + Pareto analysis</a:t>
+              <a:t>Ranked Moves — core engine</a:t>
             </a:r>
             <a:endParaRPr lang="en-US" sz="1150" dirty="0"/>
           </a:p>
@@ -7697,7 +7697,7 @@
                 <a:ea typeface="Inter" pitchFamily="34" charset="-122"/>
                 <a:cs typeface="Inter" pitchFamily="34" charset="-120"/>
               </a:rPr>
-              <a:t>Prescriptive recommendations</a:t>
+              <a:t>Geo + Pareto analysis</a:t>
             </a:r>
             <a:endParaRPr lang="en-US" sz="1150" dirty="0"/>
           </a:p>
@@ -7889,7 +7889,7 @@
                 <a:ea typeface="Instrument Serif" pitchFamily="34" charset="-122"/>
                 <a:cs typeface="Instrument Serif" pitchFamily="34" charset="-120"/>
               </a:rPr>
-              <a:t>$99</a:t>
+              <a:t>$299</a:t>
             </a:r>
             <a:pPr indent="0" marL="0">
               <a:buNone/>
@@ -7942,7 +7942,7 @@
                 <a:ea typeface="Inter" pitchFamily="34" charset="-122"/>
                 <a:cs typeface="Inter" pitchFamily="34" charset="-120"/>
               </a:rPr>
-              <a:t>Scaling $1–15M stores</a:t>
+              <a:t>Multi-location / scaling operators</a:t>
             </a:r>
             <a:endParaRPr lang="en-US" sz="1150" dirty="0"/>
           </a:p>
@@ -8012,7 +8012,7 @@
                 <a:ea typeface="Inter" pitchFamily="34" charset="-122"/>
                 <a:cs typeface="Inter" pitchFamily="34" charset="-120"/>
               </a:rPr>
-              <a:t>Cohort / LTV + one-click actions</a:t>
+              <a:t>One-click execution · full cohort/LTV</a:t>
             </a:r>
             <a:endParaRPr lang="en-US" sz="1150" dirty="0"/>
           </a:p>
@@ -8112,7 +8112,7 @@
                 <a:ea typeface="Inter" pitchFamily="34" charset="-122"/>
                 <a:cs typeface="Inter" pitchFamily="34" charset="-120"/>
               </a:rPr>
-              <a:t>Blended ARPU ~$68→$82/mo</a:t>
+              <a:t>Blended ARPU ~$150→$195/mo</a:t>
             </a:r>
             <a:pPr indent="0" marL="0">
               <a:lnSpc>
@@ -8129,7 +8129,7 @@
                 <a:ea typeface="Inter" pitchFamily="34" charset="-122"/>
                 <a:cs typeface="Inter" pitchFamily="34" charset="-120"/>
               </a:rPr>
-              <a:t>   ·   75–82% gross margin   ·   LTV:CAC 6–8:1   ·   4–6 month CAC payback   ·   land with a free “Simple Sense Audit,” expand to Pro</a:t>
+              <a:t>   ·   75–82% gross margin   ·   LTV:CAC ~8–12:1   ·   2–3 month CAC payback   ·   land with a free “Simple Sense Audit,” expand to Pro</a:t>
             </a:r>
             <a:endParaRPr lang="en-US" sz="1250" dirty="0"/>
           </a:p>
@@ -9505,7 +9505,7 @@
                 <a:ea typeface="Inter" pitchFamily="34" charset="-122"/>
                 <a:cs typeface="Inter" pitchFamily="34" charset="-120"/>
               </a:rPr>
-              <a:t>Conservative vs top-quartile Shopify-app benchmarks. Ranges, not false precision. At $49–$99 pricing, blended ARPU ~$68→$82/mo.</a:t>
+              <a:t>Conservative vs top-quartile Shopify-app benchmarks. Ranges, not false precision. At $99–$299 pricing, blended ARPU ~$150→$195/mo.</a:t>
             </a:r>
             <a:endParaRPr lang="en-US" sz="1300" dirty="0"/>
           </a:p>
@@ -9899,7 +9899,7 @@
                           <a:ea typeface="Inter" pitchFamily="34" charset="-122"/>
                           <a:cs typeface="Inter" pitchFamily="34" charset="-120"/>
                         </a:rPr>
-                        <a:t>$30–42k</a:t>
+                        <a:t>$40–60k</a:t>
                       </a:r>
                       <a:endParaRPr lang="en-US" sz="1400" dirty="0">
                         <a:latin typeface="Inter" charset="0"/>
@@ -9967,7 +9967,7 @@
                           <a:ea typeface="Inter" pitchFamily="34" charset="-122"/>
                           <a:cs typeface="Inter" pitchFamily="34" charset="-120"/>
                         </a:rPr>
-                        <a:t>$125–160k</a:t>
+                        <a:t>$170–240k</a:t>
                       </a:r>
                       <a:endParaRPr lang="en-US" sz="1400" dirty="0">
                         <a:latin typeface="Inter" charset="0"/>
@@ -10035,7 +10035,7 @@
                           <a:ea typeface="Inter" pitchFamily="34" charset="-122"/>
                           <a:cs typeface="Inter" pitchFamily="34" charset="-120"/>
                         </a:rPr>
-                        <a:t>$400–550k</a:t>
+                        <a:t>$0.5–0.75M</a:t>
                       </a:r>
                       <a:endParaRPr lang="en-US" sz="1400" dirty="0">
                         <a:latin typeface="Inter" charset="0"/>
@@ -10173,7 +10173,7 @@
                           <a:ea typeface="Inter" pitchFamily="34" charset="-122"/>
                           <a:cs typeface="Inter" pitchFamily="34" charset="-120"/>
                         </a:rPr>
-                        <a:t>$60–90k</a:t>
+                        <a:t>$80–120k</a:t>
                       </a:r>
                       <a:endParaRPr lang="en-US" sz="1400" dirty="0">
                         <a:latin typeface="Inter" charset="0"/>
@@ -10241,7 +10241,7 @@
                           <a:ea typeface="Inter" pitchFamily="34" charset="-122"/>
                           <a:cs typeface="Inter" pitchFamily="34" charset="-120"/>
                         </a:rPr>
-                        <a:t>$300–430k</a:t>
+                        <a:t>$360–540k</a:t>
                       </a:r>
                       <a:endParaRPr lang="en-US" sz="1400" dirty="0">
                         <a:latin typeface="Inter" charset="0"/>
@@ -10309,7 +10309,7 @@
                           <a:ea typeface="Inter" pitchFamily="34" charset="-122"/>
                           <a:cs typeface="Inter" pitchFamily="34" charset="-120"/>
                         </a:rPr>
-                        <a:t>$1.1–1.5M</a:t>
+                        <a:t>$1.5–2.0M</a:t>
                       </a:r>
                       <a:endParaRPr lang="en-US" sz="1400" dirty="0">
                         <a:latin typeface="Inter" charset="0"/>
@@ -10447,7 +10447,7 @@
                           <a:ea typeface="Inter" pitchFamily="34" charset="-122"/>
                           <a:cs typeface="Inter" pitchFamily="34" charset="-120"/>
                         </a:rPr>
-                        <a:t>$150–220k</a:t>
+                        <a:t>$200–300k</a:t>
                       </a:r>
                       <a:endParaRPr lang="en-US" sz="1400" dirty="0">
                         <a:latin typeface="Inter" charset="0"/>
@@ -10515,7 +10515,7 @@
                           <a:ea typeface="Inter" pitchFamily="34" charset="-122"/>
                           <a:cs typeface="Inter" pitchFamily="34" charset="-120"/>
                         </a:rPr>
-                        <a:t>$800k–1.1M</a:t>
+                        <a:t>$1.1–1.6M</a:t>
                       </a:r>
                       <a:endParaRPr lang="en-US" sz="1400" dirty="0">
                         <a:latin typeface="Inter" charset="0"/>
@@ -10583,7 +10583,7 @@
                           <a:ea typeface="Inter" pitchFamily="34" charset="-122"/>
                           <a:cs typeface="Inter" pitchFamily="34" charset="-120"/>
                         </a:rPr>
-                        <a:t>$3.0–4.0M</a:t>
+                        <a:t>$3.0–4.5M</a:t>
                       </a:r>
                       <a:endParaRPr lang="en-US" sz="1400" dirty="0">
                         <a:latin typeface="Inter" charset="0"/>
@@ -10721,7 +10721,7 @@
                 <a:ea typeface="Inter" pitchFamily="34" charset="-122"/>
                 <a:cs typeface="Inter" pitchFamily="34" charset="-120"/>
               </a:rPr>
-              <a:t>Base is the planning number — steady App Store + community flywheel, churn improving to ~2.8%, break-even ~early Year 2 (Base reaches 1,300–1,600 customers). </a:t>
+              <a:t>Base is the planning number — steady App Store + community flywheel, churn improving to ~2.8%, break-even ~late Year 1; at flat $99–299 pricing Base needs only ~700–850 customers. </a:t>
             </a:r>
             <a:pPr indent="0" marL="0">
               <a:lnSpc>
@@ -11195,7 +11195,7 @@
                 <a:ea typeface="Instrument Serif" pitchFamily="34" charset="-122"/>
                 <a:cs typeface="Instrument Serif" pitchFamily="34" charset="-120"/>
               </a:rPr>
-              <a:t>6–8:1</a:t>
+              <a:t>8–12:1</a:t>
             </a:r>
             <a:endParaRPr lang="en-US" sz="2800" dirty="0"/>
           </a:p>
@@ -11310,7 +11310,7 @@
                 <a:ea typeface="Instrument Serif" pitchFamily="34" charset="-122"/>
                 <a:cs typeface="Instrument Serif" pitchFamily="34" charset="-120"/>
               </a:rPr>
-              <a:t>4–6 mo</a:t>
+              <a:t>2–3 mo</a:t>
             </a:r>
             <a:endParaRPr lang="en-US" sz="2800" dirty="0"/>
           </a:p>
@@ -11425,7 +11425,7 @@
                 <a:ea typeface="Instrument Serif" pitchFamily="34" charset="-122"/>
                 <a:cs typeface="Instrument Serif" pitchFamily="34" charset="-120"/>
               </a:rPr>
-              <a:t>~$1.9–2.4k</a:t>
+              <a:t>~$4–5k</a:t>
             </a:r>
             <a:endParaRPr lang="en-US" sz="2400" dirty="0"/>
           </a:p>
@@ -12037,7 +12037,7 @@
                 <a:ea typeface="Inter" pitchFamily="34" charset="-122"/>
                 <a:cs typeface="Inter" pitchFamily="34" charset="-120"/>
               </a:rPr>
-              <a:t>Early Year 2:  </a:t>
+              <a:t>Late Y1 / early Y2:  </a:t>
             </a:r>
             <a:endParaRPr lang="en-US" sz="1180" dirty="0"/>
           </a:p>
@@ -12798,7 +12798,7 @@
                           <a:ea typeface="Inter" pitchFamily="34" charset="-122"/>
                           <a:cs typeface="Inter" pitchFamily="34" charset="-120"/>
                         </a:rPr>
-                        <a:t>~$99–219+/mo</a:t>
+                        <a:t>~$549–1,349+/mo (GMV-tiered)</a:t>
                       </a:r>
                       <a:endParaRPr lang="en-US" sz="1100" dirty="0">
                         <a:latin typeface="Inter" charset="0"/>
@@ -14168,7 +14168,7 @@
                           <a:ea typeface="Inter" pitchFamily="34" charset="-122"/>
                           <a:cs typeface="Inter" pitchFamily="34" charset="-120"/>
                         </a:rPr>
-                        <a:t>$49–99/mo</a:t>
+                        <a:t>$99–299/mo, flat</a:t>
                       </a:r>
                       <a:endParaRPr lang="en-US" sz="1100" dirty="0">
                         <a:latin typeface="Inter" charset="0"/>
@@ -14236,7 +14236,7 @@
                           <a:ea typeface="Inter" pitchFamily="34" charset="-122"/>
                           <a:cs typeface="Inter" pitchFamily="34" charset="-120"/>
                         </a:rPr>
-                        <a:t>We ARE the decision layer — ranked moves + expected impact, at software price</a:t>
+                        <a:t>We ARE the decision layer — ranked moves + $ impact, flat price, never GMV-taxed</a:t>
                       </a:r>
                       <a:endParaRPr lang="en-US" sz="1100" dirty="0">
                         <a:latin typeface="Inter" charset="0"/>
@@ -19354,7 +19354,7 @@
                 <a:ea typeface="Inter" pitchFamily="34" charset="-122"/>
                 <a:cs typeface="Inter" pitchFamily="34" charset="-120"/>
               </a:rPr>
-              <a:t>live on the Shopify App Store · 150–250 paying customers · agency channel signed · ROI case studies · ~$0.7–1.0M ARR run-rate.</a:t>
+              <a:t>live on the Shopify App Store · 250–400 paying customers · agency channel signed · ROI case studies · ~$0.6–0.9M ARR exit run-rate.</a:t>
             </a:r>
             <a:endParaRPr lang="en-US" sz="1150" dirty="0"/>
           </a:p>
@@ -19967,7 +19967,7 @@
                 <a:ea typeface="Inter" pitchFamily="34" charset="-122"/>
                 <a:cs typeface="Inter" pitchFamily="34" charset="-120"/>
               </a:rPr>
-              <a:t>Pricing: $49 Basic / $99 Pro per month; blended ARPU ~$68 → ~$82/mo (~$815 → ~$980/yr).</a:t>
+              <a:t>Pricing: $0 Audit / $99 Basic / $299 Pro per month (flat, not GMV-tiered); blended ARPU ~$150 → ~$195/mo (~$1,800 → ~$2,340/yr).</a:t>
             </a:r>
             <a:endParaRPr lang="en-US" sz="1000" dirty="0"/>
           </a:p>
@@ -20039,7 +20039,7 @@
                 <a:ea typeface="Inter" pitchFamily="34" charset="-122"/>
                 <a:cs typeface="Inter" pitchFamily="34" charset="-120"/>
               </a:rPr>
-              <a:t>Blended CAC ~$250–350 early → $450–600 mature; LTV:CAC 6–8:1; payback 4–6 months.</a:t>
+              <a:t>Blended CAC ~$250–350 early → $450–600 mature; LTV:CAC ~8–12:1; payback ~2–3 months.</a:t>
             </a:r>
             <a:endParaRPr lang="en-US" sz="1000" dirty="0"/>
           </a:p>
@@ -20087,7 +20087,7 @@
                 <a:ea typeface="Inter" pitchFamily="34" charset="-122"/>
                 <a:cs typeface="Inter" pitchFamily="34" charset="-120"/>
               </a:rPr>
-              <a:t>Scenarios (net of churn): Base Y3 $1.1–1.5M (1,300–1,600 cust.); Best Y3 $3.0–4.0M; Worst Y3 $400–550k.</a:t>
+              <a:t>Scenarios (net of churn): Base Y3 $1.5–2.0M (~700–850 cust.); Best Y3 $3.0–4.5M; Worst Y3 $0.5–0.75M.</a:t>
             </a:r>
             <a:endParaRPr lang="en-US" sz="1000" dirty="0"/>
           </a:p>

--- a/Simple_Sense_Investor_Deck.pptx
+++ b/Simple_Sense_Investor_Deck.pptx
@@ -2979,7 +2979,18 @@
                 <a:ea typeface="Inter" pitchFamily="34" charset="-122"/>
                 <a:cs typeface="Inter" pitchFamily="34" charset="-120"/>
               </a:rPr>
-              <a:t>Investor Overview</a:t>
+              <a:t>Investor Overview – for </a:t>
+            </a:r>
+            <a:r>
+              <a:rPr lang="en-US" sz="1300" b="1" dirty="0" err="1">
+                <a:solidFill>
+                  <a:srgbClr val="211C15"/>
+                </a:solidFill>
+                <a:latin typeface="Inter" pitchFamily="34" charset="0"/>
+                <a:ea typeface="Inter" pitchFamily="34" charset="-122"/>
+                <a:cs typeface="Inter" pitchFamily="34" charset="-120"/>
+              </a:rPr>
+              <a:t>kbengoshi@gmail.com</a:t>
             </a:r>
             <a:endParaRPr lang="en-US" sz="1300" dirty="0"/>
           </a:p>

--- a/Simple_Sense_Investor_Deck.pptx
+++ b/Simple_Sense_Investor_Deck.pptx
@@ -18115,7 +18115,7 @@
               <a:buNone/>
             </a:pPr>
             <a:r>
-              <a:rPr lang="en-US" sz="1300" b="1" kern="0" spc="100" dirty="0">
+              <a:rPr lang="en-US" sz="1300" b="1" kern="0" spc="100">
                 <a:solidFill>
                   <a:srgbClr val="074FA0"/>
                 </a:solidFill>
@@ -18123,7 +18123,7 @@
                 <a:ea typeface="Inter" pitchFamily="34" charset="-122"/>
                 <a:cs typeface="Inter" pitchFamily="34" charset="-120"/>
               </a:rPr>
-              <a:t>Founder &amp; CEO</a:t>
+              <a:t>CEO</a:t>
             </a:r>
             <a:endParaRPr lang="en-US" sz="1300" dirty="0"/>
           </a:p>
@@ -18250,7 +18250,7 @@
                 <a:ea typeface="Inter" pitchFamily="34" charset="-122"/>
                 <a:cs typeface="Inter" pitchFamily="34" charset="-120"/>
               </a:rPr>
-              <a:t>CEO of SelectBlinds — a ~$80–200M online window-treatment retailer (Hunter Douglas took a minority stake, 2023).</a:t>
+              <a:t>CEO of SelectBlinds — a ~$200M+ online window-treatment retailer exited to PE.</a:t>
             </a:r>
             <a:endParaRPr lang="en-US" sz="1300" dirty="0"/>
           </a:p>

--- a/Simple_Sense_Investor_Deck.pptx
+++ b/Simple_Sense_Investor_Deck.pptx
@@ -2979,10 +2979,10 @@
                 <a:ea typeface="Inter" pitchFamily="34" charset="-122"/>
                 <a:cs typeface="Inter" pitchFamily="34" charset="-120"/>
               </a:rPr>
-              <a:t>Investor Overview – for </a:t>
-            </a:r>
-            <a:r>
-              <a:rPr lang="en-US" sz="1300" b="1" dirty="0" err="1">
+              <a:t>Investor Overview – </a:t>
+            </a:r>
+            <a:r>
+              <a:rPr lang="en-US" sz="1300" b="1">
                 <a:solidFill>
                   <a:srgbClr val="211C15"/>
                 </a:solidFill>
@@ -2990,7 +2990,7 @@
                 <a:ea typeface="Inter" pitchFamily="34" charset="-122"/>
                 <a:cs typeface="Inter" pitchFamily="34" charset="-120"/>
               </a:rPr>
-              <a:t>kbengoshi@gmail.com</a:t>
+              <a:t>for ____________</a:t>
             </a:r>
             <a:endParaRPr lang="en-US" sz="1300" dirty="0"/>
           </a:p>
